--- a/deck/LightUp_初赛提案.pptx
+++ b/deck/LightUp_初赛提案.pptx
@@ -10475,7 +10475,7 @@
                 <a:latin typeface="Microsoft YaHei"/>
                 <a:ea typeface="Microsoft YaHei"/>
               </a:rPr>
-              <a:t>三个能力，让一个人独立走完整条链路</a:t>
+              <a:t>四个模块，从选色到试色都在同一个页面</a:t>
             </a:r>
           </a:p>
         </p:txBody>
@@ -10562,7 +10562,7 @@
         <p:spPr>
           <a:xfrm>
             <a:off x="777240" y="2743200"/>
-            <a:ext cx="3246120" cy="2148840"/>
+            <a:ext cx="2487168" cy="2148840"/>
           </a:xfrm>
           <a:prstGeom prst="roundRect">
             <a:avLst>
@@ -10595,8 +10595,8 @@
         </p:nvSpPr>
         <p:spPr>
           <a:xfrm>
-            <a:off x="1088136" y="2999232"/>
-            <a:ext cx="2560320" cy="365760"/>
+            <a:off x="1014983" y="2980944"/>
+            <a:ext cx="2121408" cy="365760"/>
           </a:xfrm>
           <a:prstGeom prst="rect">
             <a:avLst/>
@@ -10638,30 +10638,30 @@
         </p:nvSpPr>
         <p:spPr>
           <a:xfrm>
-            <a:off x="1088136" y="3291840"/>
-            <a:ext cx="2560320" cy="411480"/>
-          </a:xfrm>
-          <a:prstGeom prst="rect">
-            <a:avLst/>
-          </a:prstGeom>
-          <a:noFill/>
-        </p:spPr>
-        <p:txBody>
-          <a:bodyPr wrap="square" lIns="0" rIns="0" tIns="0" bIns="0" anchor="t">
-            <a:spAutoFit/>
-          </a:bodyPr>
-          <a:lstStyle/>
-          <a:p>
-            <a:pPr algn="l">
-              <a:lnSpc>
-                <a:spcPct val="150000"/>
-              </a:lnSpc>
-              <a:spcAft>
-                <a:spcPts val="0"/>
-              </a:spcAft>
-            </a:pPr>
-            <a:r>
-              <a:rPr sz="2200" b="1">
+            <a:off x="1014983" y="3255264"/>
+            <a:ext cx="2121408" cy="411480"/>
+          </a:xfrm>
+          <a:prstGeom prst="rect">
+            <a:avLst/>
+          </a:prstGeom>
+          <a:noFill/>
+        </p:spPr>
+        <p:txBody>
+          <a:bodyPr wrap="square" lIns="0" rIns="0" tIns="0" bIns="0" anchor="t">
+            <a:spAutoFit/>
+          </a:bodyPr>
+          <a:lstStyle/>
+          <a:p>
+            <a:pPr algn="l">
+              <a:lnSpc>
+                <a:spcPct val="150000"/>
+              </a:lnSpc>
+              <a:spcAft>
+                <a:spcPts val="0"/>
+              </a:spcAft>
+            </a:pPr>
+            <a:r>
+              <a:rPr sz="2000" b="1">
                 <a:solidFill>
                   <a:srgbClr val="ECECEE"/>
                 </a:solidFill>
@@ -10681,30 +10681,30 @@
         </p:nvSpPr>
         <p:spPr>
           <a:xfrm>
-            <a:off x="1088136" y="3785615"/>
-            <a:ext cx="2560320" cy="274320"/>
-          </a:xfrm>
-          <a:prstGeom prst="rect">
-            <a:avLst/>
-          </a:prstGeom>
-          <a:noFill/>
-        </p:spPr>
-        <p:txBody>
-          <a:bodyPr wrap="square" lIns="0" rIns="0" tIns="0" bIns="0" anchor="t">
-            <a:spAutoFit/>
-          </a:bodyPr>
-          <a:lstStyle/>
-          <a:p>
-            <a:pPr algn="l">
-              <a:lnSpc>
-                <a:spcPct val="150000"/>
-              </a:lnSpc>
-              <a:spcAft>
-                <a:spcPts val="0"/>
-              </a:spcAft>
-            </a:pPr>
-            <a:r>
-              <a:rPr sz="1050" b="0">
+            <a:off x="1014983" y="3712463"/>
+            <a:ext cx="2121408" cy="274320"/>
+          </a:xfrm>
+          <a:prstGeom prst="rect">
+            <a:avLst/>
+          </a:prstGeom>
+          <a:noFill/>
+        </p:spPr>
+        <p:txBody>
+          <a:bodyPr wrap="square" lIns="0" rIns="0" tIns="0" bIns="0" anchor="t">
+            <a:spAutoFit/>
+          </a:bodyPr>
+          <a:lstStyle/>
+          <a:p>
+            <a:pPr algn="l">
+              <a:lnSpc>
+                <a:spcPct val="150000"/>
+              </a:lnSpc>
+              <a:spcAft>
+                <a:spcPts val="0"/>
+              </a:spcAft>
+            </a:pPr>
+            <a:r>
+              <a:rPr sz="1000" b="0">
                 <a:solidFill>
                   <a:srgbClr val="9A9AA3"/>
                 </a:solidFill>
@@ -10724,7 +10724,7 @@
         </p:nvSpPr>
         <p:spPr>
           <a:xfrm>
-            <a:off x="1088136" y="4133087"/>
+            <a:off x="1014983" y="4041648"/>
             <a:ext cx="457200" cy="27432"/>
           </a:xfrm>
           <a:prstGeom prst="rect">
@@ -10754,8 +10754,8 @@
         </p:nvSpPr>
         <p:spPr>
           <a:xfrm>
-            <a:off x="1088136" y="4279392"/>
-            <a:ext cx="2606040" cy="548640"/>
+            <a:off x="1014983" y="4187952"/>
+            <a:ext cx="2176272" cy="548640"/>
           </a:xfrm>
           <a:prstGeom prst="rect">
             <a:avLst/>
@@ -10777,7 +10777,7 @@
               </a:spcAft>
             </a:pPr>
             <a:r>
-              <a:rPr sz="1050" b="0">
+              <a:rPr sz="1000" b="0">
                 <a:solidFill>
                   <a:srgbClr val="E8CF7A"/>
                 </a:solidFill>
@@ -10797,8 +10797,8 @@
         </p:nvSpPr>
         <p:spPr>
           <a:xfrm>
-            <a:off x="4178808" y="2743200"/>
-            <a:ext cx="3246120" cy="2148840"/>
+            <a:off x="3483864" y="2743200"/>
+            <a:ext cx="2487168" cy="2148840"/>
           </a:xfrm>
           <a:prstGeom prst="roundRect">
             <a:avLst>
@@ -10831,8 +10831,8 @@
         </p:nvSpPr>
         <p:spPr>
           <a:xfrm>
-            <a:off x="4489704" y="2999232"/>
-            <a:ext cx="2560320" cy="365760"/>
+            <a:off x="3721608" y="2980944"/>
+            <a:ext cx="2121408" cy="365760"/>
           </a:xfrm>
           <a:prstGeom prst="rect">
             <a:avLst/>
@@ -10874,30 +10874,30 @@
         </p:nvSpPr>
         <p:spPr>
           <a:xfrm>
-            <a:off x="4489704" y="3291840"/>
-            <a:ext cx="2560320" cy="411480"/>
-          </a:xfrm>
-          <a:prstGeom prst="rect">
-            <a:avLst/>
-          </a:prstGeom>
-          <a:noFill/>
-        </p:spPr>
-        <p:txBody>
-          <a:bodyPr wrap="square" lIns="0" rIns="0" tIns="0" bIns="0" anchor="t">
-            <a:spAutoFit/>
-          </a:bodyPr>
-          <a:lstStyle/>
-          <a:p>
-            <a:pPr algn="l">
-              <a:lnSpc>
-                <a:spcPct val="150000"/>
-              </a:lnSpc>
-              <a:spcAft>
-                <a:spcPts val="0"/>
-              </a:spcAft>
-            </a:pPr>
-            <a:r>
-              <a:rPr sz="2200" b="1">
+            <a:off x="3721608" y="3255264"/>
+            <a:ext cx="2121408" cy="411480"/>
+          </a:xfrm>
+          <a:prstGeom prst="rect">
+            <a:avLst/>
+          </a:prstGeom>
+          <a:noFill/>
+        </p:spPr>
+        <p:txBody>
+          <a:bodyPr wrap="square" lIns="0" rIns="0" tIns="0" bIns="0" anchor="t">
+            <a:spAutoFit/>
+          </a:bodyPr>
+          <a:lstStyle/>
+          <a:p>
+            <a:pPr algn="l">
+              <a:lnSpc>
+                <a:spcPct val="150000"/>
+              </a:lnSpc>
+              <a:spcAft>
+                <a:spcPts val="0"/>
+              </a:spcAft>
+            </a:pPr>
+            <a:r>
+              <a:rPr sz="2000" b="1">
                 <a:solidFill>
                   <a:srgbClr val="ECECEE"/>
                 </a:solidFill>
@@ -10917,30 +10917,30 @@
         </p:nvSpPr>
         <p:spPr>
           <a:xfrm>
-            <a:off x="4489704" y="3785615"/>
-            <a:ext cx="2560320" cy="274320"/>
-          </a:xfrm>
-          <a:prstGeom prst="rect">
-            <a:avLst/>
-          </a:prstGeom>
-          <a:noFill/>
-        </p:spPr>
-        <p:txBody>
-          <a:bodyPr wrap="square" lIns="0" rIns="0" tIns="0" bIns="0" anchor="t">
-            <a:spAutoFit/>
-          </a:bodyPr>
-          <a:lstStyle/>
-          <a:p>
-            <a:pPr algn="l">
-              <a:lnSpc>
-                <a:spcPct val="150000"/>
-              </a:lnSpc>
-              <a:spcAft>
-                <a:spcPts val="0"/>
-              </a:spcAft>
-            </a:pPr>
-            <a:r>
-              <a:rPr sz="1050" b="0">
+            <a:off x="3721608" y="3712463"/>
+            <a:ext cx="2121408" cy="274320"/>
+          </a:xfrm>
+          <a:prstGeom prst="rect">
+            <a:avLst/>
+          </a:prstGeom>
+          <a:noFill/>
+        </p:spPr>
+        <p:txBody>
+          <a:bodyPr wrap="square" lIns="0" rIns="0" tIns="0" bIns="0" anchor="t">
+            <a:spAutoFit/>
+          </a:bodyPr>
+          <a:lstStyle/>
+          <a:p>
+            <a:pPr algn="l">
+              <a:lnSpc>
+                <a:spcPct val="150000"/>
+              </a:lnSpc>
+              <a:spcAft>
+                <a:spcPts val="0"/>
+              </a:spcAft>
+            </a:pPr>
+            <a:r>
+              <a:rPr sz="1000" b="0">
                 <a:solidFill>
                   <a:srgbClr val="9A9AA3"/>
                 </a:solidFill>
@@ -10960,7 +10960,7 @@
         </p:nvSpPr>
         <p:spPr>
           <a:xfrm>
-            <a:off x="4489704" y="4133087"/>
+            <a:off x="3721608" y="4041648"/>
             <a:ext cx="457200" cy="27432"/>
           </a:xfrm>
           <a:prstGeom prst="rect">
@@ -10990,8 +10990,8 @@
         </p:nvSpPr>
         <p:spPr>
           <a:xfrm>
-            <a:off x="4489704" y="4279392"/>
-            <a:ext cx="2606040" cy="548640"/>
+            <a:off x="3721608" y="4187952"/>
+            <a:ext cx="2176272" cy="548640"/>
           </a:xfrm>
           <a:prstGeom prst="rect">
             <a:avLst/>
@@ -11013,14 +11013,14 @@
               </a:spcAft>
             </a:pPr>
             <a:r>
-              <a:rPr sz="1050" b="0">
+              <a:rPr sz="1000" b="0">
                 <a:solidFill>
                   <a:srgbClr val="E8CF7A"/>
                 </a:solidFill>
                 <a:latin typeface="Microsoft YaHei"/>
                 <a:ea typeface="Microsoft YaHei"/>
               </a:rPr>
-              <a:t>ITA° 肤色角 · 冷暖 · 推荐与避雷色系</a:t>
+              <a:t>肤色深浅 · 冷暖 · 3 支推荐色号</a:t>
             </a:r>
           </a:p>
         </p:txBody>
@@ -11033,8 +11033,8 @@
         </p:nvSpPr>
         <p:spPr>
           <a:xfrm>
-            <a:off x="7580376" y="2743200"/>
-            <a:ext cx="3246120" cy="2148840"/>
+            <a:off x="6190488" y="2743200"/>
+            <a:ext cx="2487168" cy="2148840"/>
           </a:xfrm>
           <a:prstGeom prst="roundRect">
             <a:avLst>
@@ -11067,8 +11067,8 @@
         </p:nvSpPr>
         <p:spPr>
           <a:xfrm>
-            <a:off x="7891272" y="2999232"/>
-            <a:ext cx="2560320" cy="365760"/>
+            <a:off x="6428231" y="2980944"/>
+            <a:ext cx="2121408" cy="365760"/>
           </a:xfrm>
           <a:prstGeom prst="rect">
             <a:avLst/>
@@ -11110,30 +11110,30 @@
         </p:nvSpPr>
         <p:spPr>
           <a:xfrm>
-            <a:off x="7891272" y="3291840"/>
-            <a:ext cx="2560320" cy="411480"/>
-          </a:xfrm>
-          <a:prstGeom prst="rect">
-            <a:avLst/>
-          </a:prstGeom>
-          <a:noFill/>
-        </p:spPr>
-        <p:txBody>
-          <a:bodyPr wrap="square" lIns="0" rIns="0" tIns="0" bIns="0" anchor="t">
-            <a:spAutoFit/>
-          </a:bodyPr>
-          <a:lstStyle/>
-          <a:p>
-            <a:pPr algn="l">
-              <a:lnSpc>
-                <a:spcPct val="150000"/>
-              </a:lnSpc>
-              <a:spcAft>
-                <a:spcPts val="0"/>
-              </a:spcAft>
-            </a:pPr>
-            <a:r>
-              <a:rPr sz="2200" b="1">
+            <a:off x="6428231" y="3255264"/>
+            <a:ext cx="2121408" cy="411480"/>
+          </a:xfrm>
+          <a:prstGeom prst="rect">
+            <a:avLst/>
+          </a:prstGeom>
+          <a:noFill/>
+        </p:spPr>
+        <p:txBody>
+          <a:bodyPr wrap="square" lIns="0" rIns="0" tIns="0" bIns="0" anchor="t">
+            <a:spAutoFit/>
+          </a:bodyPr>
+          <a:lstStyle/>
+          <a:p>
+            <a:pPr algn="l">
+              <a:lnSpc>
+                <a:spcPct val="150000"/>
+              </a:lnSpc>
+              <a:spcAft>
+                <a:spcPts val="0"/>
+              </a:spcAft>
+            </a:pPr>
+            <a:r>
+              <a:rPr sz="2000" b="1">
                 <a:solidFill>
                   <a:srgbClr val="ECECEE"/>
                 </a:solidFill>
@@ -11153,30 +11153,30 @@
         </p:nvSpPr>
         <p:spPr>
           <a:xfrm>
-            <a:off x="7891272" y="3785615"/>
-            <a:ext cx="2560320" cy="274320"/>
-          </a:xfrm>
-          <a:prstGeom prst="rect">
-            <a:avLst/>
-          </a:prstGeom>
-          <a:noFill/>
-        </p:spPr>
-        <p:txBody>
-          <a:bodyPr wrap="square" lIns="0" rIns="0" tIns="0" bIns="0" anchor="t">
-            <a:spAutoFit/>
-          </a:bodyPr>
-          <a:lstStyle/>
-          <a:p>
-            <a:pPr algn="l">
-              <a:lnSpc>
-                <a:spcPct val="150000"/>
-              </a:lnSpc>
-              <a:spcAft>
-                <a:spcPts val="0"/>
-              </a:spcAft>
-            </a:pPr>
-            <a:r>
-              <a:rPr sz="1050" b="0">
+            <a:off x="6428231" y="3712463"/>
+            <a:ext cx="2121408" cy="274320"/>
+          </a:xfrm>
+          <a:prstGeom prst="rect">
+            <a:avLst/>
+          </a:prstGeom>
+          <a:noFill/>
+        </p:spPr>
+        <p:txBody>
+          <a:bodyPr wrap="square" lIns="0" rIns="0" tIns="0" bIns="0" anchor="t">
+            <a:spAutoFit/>
+          </a:bodyPr>
+          <a:lstStyle/>
+          <a:p>
+            <a:pPr algn="l">
+              <a:lnSpc>
+                <a:spcPct val="150000"/>
+              </a:lnSpc>
+              <a:spcAft>
+                <a:spcPts val="0"/>
+              </a:spcAft>
+            </a:pPr>
+            <a:r>
+              <a:rPr sz="1000" b="0">
                 <a:solidFill>
                   <a:srgbClr val="9A9AA3"/>
                 </a:solidFill>
@@ -11196,7 +11196,7 @@
         </p:nvSpPr>
         <p:spPr>
           <a:xfrm>
-            <a:off x="7891272" y="4133087"/>
+            <a:off x="6428231" y="4041648"/>
             <a:ext cx="457200" cy="27432"/>
           </a:xfrm>
           <a:prstGeom prst="rect">
@@ -11226,8 +11226,8 @@
         </p:nvSpPr>
         <p:spPr>
           <a:xfrm>
-            <a:off x="7891272" y="4279392"/>
-            <a:ext cx="2606040" cy="548640"/>
+            <a:off x="6428231" y="4187952"/>
+            <a:ext cx="2176272" cy="548640"/>
           </a:xfrm>
           <a:prstGeom prst="rect">
             <a:avLst/>
@@ -11249,7 +11249,7 @@
               </a:spcAft>
             </a:pPr>
             <a:r>
-              <a:rPr sz="1050" b="0">
+              <a:rPr sz="1000" b="0">
                 <a:solidFill>
                   <a:srgbClr val="E8CF7A"/>
                 </a:solidFill>
@@ -11263,7 +11263,243 @@
       </p:sp>
       <p:sp>
         <p:nvSpPr>
-          <p:cNvPr id="26" name="TextBox 25"/>
+          <p:cNvPr id="26" name="Rounded Rectangle 25"/>
+          <p:cNvSpPr/>
+          <p:nvPr/>
+        </p:nvSpPr>
+        <p:spPr>
+          <a:xfrm>
+            <a:off x="8897112" y="2743200"/>
+            <a:ext cx="2487168" cy="2148840"/>
+          </a:xfrm>
+          <a:prstGeom prst="roundRect">
+            <a:avLst>
+              <a:gd name="adj" fmla="val 6000"/>
+            </a:avLst>
+          </a:prstGeom>
+          <a:solidFill>
+            <a:srgbClr val="101013"/>
+          </a:solidFill>
+          <a:ln w="9525">
+            <a:solidFill>
+              <a:srgbClr val="232329"/>
+            </a:solidFill>
+          </a:ln>
+          <a:effectLst/>
+        </p:spPr>
+        <p:txBody>
+          <a:bodyPr rtlCol="0" anchor="ctr"/>
+          <a:lstStyle/>
+          <a:p>
+            <a:pPr algn="ctr"/>
+          </a:p>
+        </p:txBody>
+      </p:sp>
+      <p:sp>
+        <p:nvSpPr>
+          <p:cNvPr id="27" name="TextBox 26"/>
+          <p:cNvSpPr txBox="1"/>
+          <p:nvPr/>
+        </p:nvSpPr>
+        <p:spPr>
+          <a:xfrm>
+            <a:off x="9134856" y="2980944"/>
+            <a:ext cx="2121408" cy="365760"/>
+          </a:xfrm>
+          <a:prstGeom prst="rect">
+            <a:avLst/>
+          </a:prstGeom>
+          <a:noFill/>
+        </p:spPr>
+        <p:txBody>
+          <a:bodyPr wrap="square" lIns="0" rIns="0" tIns="0" bIns="0" anchor="t">
+            <a:spAutoFit/>
+          </a:bodyPr>
+          <a:lstStyle/>
+          <a:p>
+            <a:pPr algn="l">
+              <a:lnSpc>
+                <a:spcPct val="150000"/>
+              </a:lnSpc>
+              <a:spcAft>
+                <a:spcPts val="0"/>
+              </a:spcAft>
+            </a:pPr>
+            <a:r>
+              <a:rPr sz="1000" b="0">
+                <a:solidFill>
+                  <a:srgbClr val="C9A227"/>
+                </a:solidFill>
+                <a:latin typeface="Microsoft YaHei"/>
+                <a:ea typeface="Microsoft YaHei"/>
+              </a:rPr>
+              <a:t>04</a:t>
+            </a:r>
+          </a:p>
+        </p:txBody>
+      </p:sp>
+      <p:sp>
+        <p:nvSpPr>
+          <p:cNvPr id="28" name="TextBox 27"/>
+          <p:cNvSpPr txBox="1"/>
+          <p:nvPr/>
+        </p:nvSpPr>
+        <p:spPr>
+          <a:xfrm>
+            <a:off x="9134856" y="3255264"/>
+            <a:ext cx="2121408" cy="411480"/>
+          </a:xfrm>
+          <a:prstGeom prst="rect">
+            <a:avLst/>
+          </a:prstGeom>
+          <a:noFill/>
+        </p:spPr>
+        <p:txBody>
+          <a:bodyPr wrap="square" lIns="0" rIns="0" tIns="0" bIns="0" anchor="t">
+            <a:spAutoFit/>
+          </a:bodyPr>
+          <a:lstStyle/>
+          <a:p>
+            <a:pPr algn="l">
+              <a:lnSpc>
+                <a:spcPct val="150000"/>
+              </a:lnSpc>
+              <a:spcAft>
+                <a:spcPts val="0"/>
+              </a:spcAft>
+            </a:pPr>
+            <a:r>
+              <a:rPr sz="2000" b="1">
+                <a:solidFill>
+                  <a:srgbClr val="ECECEE"/>
+                </a:solidFill>
+                <a:latin typeface="Microsoft YaHei"/>
+                <a:ea typeface="Microsoft YaHei"/>
+              </a:rPr>
+              <a:t>试色</a:t>
+            </a:r>
+          </a:p>
+        </p:txBody>
+      </p:sp>
+      <p:sp>
+        <p:nvSpPr>
+          <p:cNvPr id="29" name="TextBox 28"/>
+          <p:cNvSpPr txBox="1"/>
+          <p:nvPr/>
+        </p:nvSpPr>
+        <p:spPr>
+          <a:xfrm>
+            <a:off x="9134856" y="3712463"/>
+            <a:ext cx="2121408" cy="274320"/>
+          </a:xfrm>
+          <a:prstGeom prst="rect">
+            <a:avLst/>
+          </a:prstGeom>
+          <a:noFill/>
+        </p:spPr>
+        <p:txBody>
+          <a:bodyPr wrap="square" lIns="0" rIns="0" tIns="0" bIns="0" anchor="t">
+            <a:spAutoFit/>
+          </a:bodyPr>
+          <a:lstStyle/>
+          <a:p>
+            <a:pPr algn="l">
+              <a:lnSpc>
+                <a:spcPct val="150000"/>
+              </a:lnSpc>
+              <a:spcAft>
+                <a:spcPts val="0"/>
+              </a:spcAft>
+            </a:pPr>
+            <a:r>
+              <a:rPr sz="1000" b="0">
+                <a:solidFill>
+                  <a:srgbClr val="9A9AA3"/>
+                </a:solidFill>
+                <a:latin typeface="Microsoft YaHei"/>
+                <a:ea typeface="Microsoft YaHei"/>
+              </a:rPr>
+              <a:t>选一支色号</a:t>
+            </a:r>
+          </a:p>
+        </p:txBody>
+      </p:sp>
+      <p:sp>
+        <p:nvSpPr>
+          <p:cNvPr id="30" name="Rectangle 29"/>
+          <p:cNvSpPr/>
+          <p:nvPr/>
+        </p:nvSpPr>
+        <p:spPr>
+          <a:xfrm>
+            <a:off x="9134856" y="4041648"/>
+            <a:ext cx="457200" cy="27432"/>
+          </a:xfrm>
+          <a:prstGeom prst="rect">
+            <a:avLst/>
+          </a:prstGeom>
+          <a:solidFill>
+            <a:srgbClr val="C9A227"/>
+          </a:solidFill>
+          <a:ln>
+            <a:noFill/>
+          </a:ln>
+          <a:effectLst/>
+        </p:spPr>
+        <p:txBody>
+          <a:bodyPr rtlCol="0" anchor="ctr"/>
+          <a:lstStyle/>
+          <a:p>
+            <a:pPr algn="ctr"/>
+          </a:p>
+        </p:txBody>
+      </p:sp>
+      <p:sp>
+        <p:nvSpPr>
+          <p:cNvPr id="31" name="TextBox 30"/>
+          <p:cNvSpPr txBox="1"/>
+          <p:nvPr/>
+        </p:nvSpPr>
+        <p:spPr>
+          <a:xfrm>
+            <a:off x="9134856" y="4187952"/>
+            <a:ext cx="2176272" cy="548640"/>
+          </a:xfrm>
+          <a:prstGeom prst="rect">
+            <a:avLst/>
+          </a:prstGeom>
+          <a:noFill/>
+        </p:spPr>
+        <p:txBody>
+          <a:bodyPr wrap="square" lIns="0" rIns="0" tIns="0" bIns="0" anchor="t">
+            <a:spAutoFit/>
+          </a:bodyPr>
+          <a:lstStyle/>
+          <a:p>
+            <a:pPr algn="l">
+              <a:lnSpc>
+                <a:spcPct val="155000"/>
+              </a:lnSpc>
+              <a:spcAft>
+                <a:spcPts val="0"/>
+              </a:spcAft>
+            </a:pPr>
+            <a:r>
+              <a:rPr sz="1000" b="0">
+                <a:solidFill>
+                  <a:srgbClr val="E8CF7A"/>
+                </a:solidFill>
+                <a:latin typeface="Microsoft YaHei"/>
+                <a:ea typeface="Microsoft YaHei"/>
+              </a:rPr>
+              <a:t>直接涂在唇形上，可快速换色</a:t>
+            </a:r>
+          </a:p>
+        </p:txBody>
+      </p:sp>
+      <p:sp>
+        <p:nvSpPr>
+          <p:cNvPr id="32" name="TextBox 31"/>
           <p:cNvSpPr txBox="1"/>
           <p:nvPr/>
         </p:nvSpPr>
@@ -11306,7 +11542,7 @@
       </p:sp>
       <p:sp>
         <p:nvSpPr>
-          <p:cNvPr id="27" name="TextBox 26"/>
+          <p:cNvPr id="33" name="TextBox 32"/>
           <p:cNvSpPr txBox="1"/>
           <p:nvPr/>
         </p:nvSpPr>

--- a/deck/LightUp_初赛提案.pptx
+++ b/deck/LightUp_初赛提案.pptx
@@ -11578,7 +11578,7 @@
                 <a:latin typeface="Microsoft YaHei"/>
                 <a:ea typeface="Microsoft YaHei"/>
               </a:rPr>
-              <a:t>另有：可调取样半径 + 放大镜 · 实时试色 · 离线问答 · 声音总开关与语速（全部离线，不依赖任何 API）。</a:t>
+              <a:t>另有：可调取样半径 + 放大镜 · 实时试色 · 离线问答 · 播报/操作提示/语速（全部离线，不依赖任何 API）。</a:t>
             </a:r>
           </a:p>
         </p:txBody>
